--- a/p03/A-frame-Boolean-operations.pptx
+++ b/p03/A-frame-Boolean-operations.pptx
@@ -207,7 +207,7 @@
           <a:p>
             <a:fld id="{FA1E3CD0-6E24-4AC0-945A-82AEC1490673}" type="datetimeFigureOut">
               <a:rPr lang="en-US" smtClean="0"/>
-              <a:t>1/6/2026</a:t>
+              <a:t>5/20/2026</a:t>
             </a:fld>
             <a:endParaRPr lang="en-US"/>
           </a:p>
@@ -605,7 +605,7 @@
           <a:p>
             <a:fld id="{846CE7D5-CF57-46EF-B807-FDD0502418D4}" type="datetimeFigureOut">
               <a:rPr lang="en-US" smtClean="0"/>
-              <a:t>1/6/2026</a:t>
+              <a:t>5/20/2026</a:t>
             </a:fld>
             <a:endParaRPr lang="en-US"/>
           </a:p>
@@ -775,7 +775,7 @@
           <a:p>
             <a:fld id="{846CE7D5-CF57-46EF-B807-FDD0502418D4}" type="datetimeFigureOut">
               <a:rPr lang="en-US" smtClean="0"/>
-              <a:t>1/6/2026</a:t>
+              <a:t>5/20/2026</a:t>
             </a:fld>
             <a:endParaRPr lang="en-US"/>
           </a:p>
@@ -955,7 +955,7 @@
           <a:p>
             <a:fld id="{846CE7D5-CF57-46EF-B807-FDD0502418D4}" type="datetimeFigureOut">
               <a:rPr lang="en-US" smtClean="0"/>
-              <a:t>1/6/2026</a:t>
+              <a:t>5/20/2026</a:t>
             </a:fld>
             <a:endParaRPr lang="en-US"/>
           </a:p>
@@ -1125,7 +1125,7 @@
           <a:p>
             <a:fld id="{846CE7D5-CF57-46EF-B807-FDD0502418D4}" type="datetimeFigureOut">
               <a:rPr lang="en-US" smtClean="0"/>
-              <a:t>1/6/2026</a:t>
+              <a:t>5/20/2026</a:t>
             </a:fld>
             <a:endParaRPr lang="en-US"/>
           </a:p>
@@ -1371,7 +1371,7 @@
           <a:p>
             <a:fld id="{846CE7D5-CF57-46EF-B807-FDD0502418D4}" type="datetimeFigureOut">
               <a:rPr lang="en-US" smtClean="0"/>
-              <a:t>1/6/2026</a:t>
+              <a:t>5/20/2026</a:t>
             </a:fld>
             <a:endParaRPr lang="en-US"/>
           </a:p>
@@ -1603,7 +1603,7 @@
           <a:p>
             <a:fld id="{846CE7D5-CF57-46EF-B807-FDD0502418D4}" type="datetimeFigureOut">
               <a:rPr lang="en-US" smtClean="0"/>
-              <a:t>1/6/2026</a:t>
+              <a:t>5/20/2026</a:t>
             </a:fld>
             <a:endParaRPr lang="en-US"/>
           </a:p>
@@ -1970,7 +1970,7 @@
           <a:p>
             <a:fld id="{846CE7D5-CF57-46EF-B807-FDD0502418D4}" type="datetimeFigureOut">
               <a:rPr lang="en-US" smtClean="0"/>
-              <a:t>1/6/2026</a:t>
+              <a:t>5/20/2026</a:t>
             </a:fld>
             <a:endParaRPr lang="en-US"/>
           </a:p>
@@ -2088,7 +2088,7 @@
           <a:p>
             <a:fld id="{846CE7D5-CF57-46EF-B807-FDD0502418D4}" type="datetimeFigureOut">
               <a:rPr lang="en-US" smtClean="0"/>
-              <a:t>1/6/2026</a:t>
+              <a:t>5/20/2026</a:t>
             </a:fld>
             <a:endParaRPr lang="en-US"/>
           </a:p>
@@ -2183,7 +2183,7 @@
           <a:p>
             <a:fld id="{846CE7D5-CF57-46EF-B807-FDD0502418D4}" type="datetimeFigureOut">
               <a:rPr lang="en-US" smtClean="0"/>
-              <a:t>1/6/2026</a:t>
+              <a:t>5/20/2026</a:t>
             </a:fld>
             <a:endParaRPr lang="en-US"/>
           </a:p>
@@ -2460,7 +2460,7 @@
           <a:p>
             <a:fld id="{846CE7D5-CF57-46EF-B807-FDD0502418D4}" type="datetimeFigureOut">
               <a:rPr lang="en-US" smtClean="0"/>
-              <a:t>1/6/2026</a:t>
+              <a:t>5/20/2026</a:t>
             </a:fld>
             <a:endParaRPr lang="en-US"/>
           </a:p>
@@ -2717,7 +2717,7 @@
           <a:p>
             <a:fld id="{846CE7D5-CF57-46EF-B807-FDD0502418D4}" type="datetimeFigureOut">
               <a:rPr lang="en-US" smtClean="0"/>
-              <a:t>1/6/2026</a:t>
+              <a:t>5/20/2026</a:t>
             </a:fld>
             <a:endParaRPr lang="en-US"/>
           </a:p>
@@ -2930,7 +2930,7 @@
           <a:p>
             <a:fld id="{846CE7D5-CF57-46EF-B807-FDD0502418D4}" type="datetimeFigureOut">
               <a:rPr lang="en-US" smtClean="0"/>
-              <a:t>1/6/2026</a:t>
+              <a:t>5/20/2026</a:t>
             </a:fld>
             <a:endParaRPr lang="en-US"/>
           </a:p>
@@ -5143,10 +5143,15 @@
             <p:ph idx="1"/>
           </p:nvPr>
         </p:nvSpPr>
-        <p:spPr/>
+        <p:spPr>
+          <a:xfrm>
+            <a:off x="838200" y="1825624"/>
+            <a:ext cx="10515600" cy="4575175"/>
+          </a:xfrm>
+        </p:spPr>
         <p:txBody>
           <a:bodyPr>
-            <a:normAutofit lnSpcReduction="10000"/>
+            <a:normAutofit fontScale="92500" lnSpcReduction="10000"/>
           </a:bodyPr>
           <a:lstStyle/>
           <a:p>
@@ -5211,6 +5216,12 @@
             <a:pPr marL="0" indent="0">
               <a:buNone/>
             </a:pPr>
+            <a:endParaRPr lang="en-US" dirty="0"/>
+          </a:p>
+          <a:p>
+            <a:pPr marL="0" indent="0">
+              <a:buNone/>
+            </a:pPr>
             <a:r>
               <a:rPr lang="en-US" b="1" dirty="0"/>
               <a:t>CMYK</a:t>
@@ -5365,12 +5376,6 @@
               <a:rPr lang="en-US" dirty="0"/>
               <a:t>”</a:t>
             </a:r>
-          </a:p>
-          <a:p>
-            <a:pPr marL="0" indent="0">
-              <a:buNone/>
-            </a:pPr>
-            <a:endParaRPr lang="en-US" dirty="0"/>
           </a:p>
         </p:txBody>
       </p:sp>
@@ -5823,7 +5828,7 @@
             </a:pPr>
             <a:r>
               <a:rPr lang="en-US" dirty="0"/>
-              <a:t>&lt;/a-box&gt;</a:t>
+              <a:t>	&lt;/a-box&gt;</a:t>
             </a:r>
           </a:p>
           <a:p>
@@ -5841,7 +5846,7 @@
             </a:pPr>
             <a:r>
               <a:rPr lang="en-US" dirty="0"/>
-              <a:t>&lt;/a-sphere&gt;</a:t>
+              <a:t>	&lt;/a-sphere&gt;</a:t>
             </a:r>
           </a:p>
           <a:p>
@@ -5859,7 +5864,7 @@
             </a:pPr>
             <a:r>
               <a:rPr lang="en-US" dirty="0"/>
-              <a:t>&lt;/a-cylinder&gt;</a:t>
+              <a:t>	&lt;/a-cylinder&gt;</a:t>
             </a:r>
           </a:p>
           <a:p>

--- a/p03/A-frame-Boolean-operations.pptx
+++ b/p03/A-frame-Boolean-operations.pptx
@@ -4674,7 +4674,7 @@
         </p:blipFill>
         <p:spPr>
           <a:xfrm>
-            <a:off x="3819327" y="2215410"/>
+            <a:off x="3750639" y="2275512"/>
             <a:ext cx="4553345" cy="2427180"/>
           </a:xfrm>
           <a:prstGeom prst="rect">
